--- a/中越詩歌/親愛耶穌_Càng yêu Chúa hơn.pptx
+++ b/中越詩歌/親愛耶穌_Càng yêu Chúa hơn.pptx
@@ -120,6 +120,11 @@
       </a:defRPr>
     </a:lvl9pPr>
   </p:defaultTextStyle>
+  <p:extLst>
+    <p:ext uri="{EFAFB233-063F-42B5-8137-9DF3F51BA10A}">
+      <p15:sldGuideLst xmlns:p15="http://schemas.microsoft.com/office/powerpoint/2012/main"/>
+    </p:ext>
+  </p:extLst>
 </p:presentation>
 </file>
 
@@ -161,7 +166,7 @@
           <a:lstStyle/>
           <a:p>
             <a:r>
-              <a:rPr lang="en-US" altLang="zh-TW" smtClean="0"/>
+              <a:rPr lang="en-US" altLang="zh-TW"/>
               <a:t>Click to edit Master title style</a:t>
             </a:r>
             <a:endParaRPr lang="zh-TW" altLang="en-US"/>
@@ -280,7 +285,7 @@
           </a:lstStyle>
           <a:p>
             <a:r>
-              <a:rPr lang="en-US" altLang="zh-TW" smtClean="0"/>
+              <a:rPr lang="en-US" altLang="zh-TW"/>
               <a:t>Click to edit Master subtitle style</a:t>
             </a:r>
             <a:endParaRPr lang="zh-TW" altLang="en-US"/>
@@ -304,7 +309,7 @@
           <a:p>
             <a:fld id="{4B6CAC28-8530-41E9-B383-7D910AF0A2E7}" type="datetimeFigureOut">
               <a:rPr lang="vi-VN" smtClean="0"/>
-              <a:t>03/04/2021</a:t>
+              <a:t>27/01/2025</a:t>
             </a:fld>
             <a:endParaRPr lang="vi-VN"/>
           </a:p>
@@ -398,7 +403,7 @@
           <a:lstStyle/>
           <a:p>
             <a:r>
-              <a:rPr lang="en-US" altLang="zh-TW" smtClean="0"/>
+              <a:rPr lang="en-US" altLang="zh-TW"/>
               <a:t>Click to edit Master title style</a:t>
             </a:r>
             <a:endParaRPr lang="zh-TW" altLang="en-US"/>
@@ -422,35 +427,35 @@
           <a:p>
             <a:pPr lvl="0"/>
             <a:r>
-              <a:rPr lang="en-US" altLang="zh-TW" smtClean="0"/>
+              <a:rPr lang="en-US" altLang="zh-TW"/>
               <a:t>Edit Master text styles</a:t>
             </a:r>
           </a:p>
           <a:p>
             <a:pPr lvl="1"/>
             <a:r>
-              <a:rPr lang="en-US" altLang="zh-TW" smtClean="0"/>
+              <a:rPr lang="en-US" altLang="zh-TW"/>
               <a:t>Second level</a:t>
             </a:r>
           </a:p>
           <a:p>
             <a:pPr lvl="2"/>
             <a:r>
-              <a:rPr lang="en-US" altLang="zh-TW" smtClean="0"/>
+              <a:rPr lang="en-US" altLang="zh-TW"/>
               <a:t>Third level</a:t>
             </a:r>
           </a:p>
           <a:p>
             <a:pPr lvl="3"/>
             <a:r>
-              <a:rPr lang="en-US" altLang="zh-TW" smtClean="0"/>
+              <a:rPr lang="en-US" altLang="zh-TW"/>
               <a:t>Fourth level</a:t>
             </a:r>
           </a:p>
           <a:p>
             <a:pPr lvl="4"/>
             <a:r>
-              <a:rPr lang="en-US" altLang="zh-TW" smtClean="0"/>
+              <a:rPr lang="en-US" altLang="zh-TW"/>
               <a:t>Fifth level</a:t>
             </a:r>
             <a:endParaRPr lang="zh-TW" altLang="en-US"/>
@@ -474,7 +479,7 @@
           <a:p>
             <a:fld id="{4B6CAC28-8530-41E9-B383-7D910AF0A2E7}" type="datetimeFigureOut">
               <a:rPr lang="vi-VN" smtClean="0"/>
-              <a:t>03/04/2021</a:t>
+              <a:t>27/01/2025</a:t>
             </a:fld>
             <a:endParaRPr lang="vi-VN"/>
           </a:p>
@@ -573,7 +578,7 @@
           <a:lstStyle/>
           <a:p>
             <a:r>
-              <a:rPr lang="en-US" altLang="zh-TW" smtClean="0"/>
+              <a:rPr lang="en-US" altLang="zh-TW"/>
               <a:t>Click to edit Master title style</a:t>
             </a:r>
             <a:endParaRPr lang="zh-TW" altLang="en-US"/>
@@ -602,35 +607,35 @@
           <a:p>
             <a:pPr lvl="0"/>
             <a:r>
-              <a:rPr lang="en-US" altLang="zh-TW" smtClean="0"/>
+              <a:rPr lang="en-US" altLang="zh-TW"/>
               <a:t>Edit Master text styles</a:t>
             </a:r>
           </a:p>
           <a:p>
             <a:pPr lvl="1"/>
             <a:r>
-              <a:rPr lang="en-US" altLang="zh-TW" smtClean="0"/>
+              <a:rPr lang="en-US" altLang="zh-TW"/>
               <a:t>Second level</a:t>
             </a:r>
           </a:p>
           <a:p>
             <a:pPr lvl="2"/>
             <a:r>
-              <a:rPr lang="en-US" altLang="zh-TW" smtClean="0"/>
+              <a:rPr lang="en-US" altLang="zh-TW"/>
               <a:t>Third level</a:t>
             </a:r>
           </a:p>
           <a:p>
             <a:pPr lvl="3"/>
             <a:r>
-              <a:rPr lang="en-US" altLang="zh-TW" smtClean="0"/>
+              <a:rPr lang="en-US" altLang="zh-TW"/>
               <a:t>Fourth level</a:t>
             </a:r>
           </a:p>
           <a:p>
             <a:pPr lvl="4"/>
             <a:r>
-              <a:rPr lang="en-US" altLang="zh-TW" smtClean="0"/>
+              <a:rPr lang="en-US" altLang="zh-TW"/>
               <a:t>Fifth level</a:t>
             </a:r>
             <a:endParaRPr lang="zh-TW" altLang="en-US"/>
@@ -654,7 +659,7 @@
           <a:p>
             <a:fld id="{4B6CAC28-8530-41E9-B383-7D910AF0A2E7}" type="datetimeFigureOut">
               <a:rPr lang="vi-VN" smtClean="0"/>
-              <a:t>03/04/2021</a:t>
+              <a:t>27/01/2025</a:t>
             </a:fld>
             <a:endParaRPr lang="vi-VN"/>
           </a:p>
@@ -748,7 +753,7 @@
           <a:lstStyle/>
           <a:p>
             <a:r>
-              <a:rPr lang="en-US" altLang="zh-TW" smtClean="0"/>
+              <a:rPr lang="en-US" altLang="zh-TW"/>
               <a:t>Click to edit Master title style</a:t>
             </a:r>
             <a:endParaRPr lang="zh-TW" altLang="en-US"/>
@@ -772,35 +777,35 @@
           <a:p>
             <a:pPr lvl="0"/>
             <a:r>
-              <a:rPr lang="en-US" altLang="zh-TW" smtClean="0"/>
+              <a:rPr lang="en-US" altLang="zh-TW"/>
               <a:t>Edit Master text styles</a:t>
             </a:r>
           </a:p>
           <a:p>
             <a:pPr lvl="1"/>
             <a:r>
-              <a:rPr lang="en-US" altLang="zh-TW" smtClean="0"/>
+              <a:rPr lang="en-US" altLang="zh-TW"/>
               <a:t>Second level</a:t>
             </a:r>
           </a:p>
           <a:p>
             <a:pPr lvl="2"/>
             <a:r>
-              <a:rPr lang="en-US" altLang="zh-TW" smtClean="0"/>
+              <a:rPr lang="en-US" altLang="zh-TW"/>
               <a:t>Third level</a:t>
             </a:r>
           </a:p>
           <a:p>
             <a:pPr lvl="3"/>
             <a:r>
-              <a:rPr lang="en-US" altLang="zh-TW" smtClean="0"/>
+              <a:rPr lang="en-US" altLang="zh-TW"/>
               <a:t>Fourth level</a:t>
             </a:r>
           </a:p>
           <a:p>
             <a:pPr lvl="4"/>
             <a:r>
-              <a:rPr lang="en-US" altLang="zh-TW" smtClean="0"/>
+              <a:rPr lang="en-US" altLang="zh-TW"/>
               <a:t>Fifth level</a:t>
             </a:r>
             <a:endParaRPr lang="zh-TW" altLang="en-US"/>
@@ -824,7 +829,7 @@
           <a:p>
             <a:fld id="{4B6CAC28-8530-41E9-B383-7D910AF0A2E7}" type="datetimeFigureOut">
               <a:rPr lang="vi-VN" smtClean="0"/>
-              <a:t>03/04/2021</a:t>
+              <a:t>27/01/2025</a:t>
             </a:fld>
             <a:endParaRPr lang="vi-VN"/>
           </a:p>
@@ -927,7 +932,7 @@
           </a:lstStyle>
           <a:p>
             <a:r>
-              <a:rPr lang="en-US" altLang="zh-TW" smtClean="0"/>
+              <a:rPr lang="en-US" altLang="zh-TW"/>
               <a:t>Click to edit Master title style</a:t>
             </a:r>
             <a:endParaRPr lang="zh-TW" altLang="en-US"/>
@@ -1047,7 +1052,7 @@
           <a:p>
             <a:pPr lvl="0"/>
             <a:r>
-              <a:rPr lang="en-US" altLang="zh-TW" smtClean="0"/>
+              <a:rPr lang="en-US" altLang="zh-TW"/>
               <a:t>Edit Master text styles</a:t>
             </a:r>
           </a:p>
@@ -1070,7 +1075,7 @@
           <a:p>
             <a:fld id="{4B6CAC28-8530-41E9-B383-7D910AF0A2E7}" type="datetimeFigureOut">
               <a:rPr lang="vi-VN" smtClean="0"/>
-              <a:t>03/04/2021</a:t>
+              <a:t>27/01/2025</a:t>
             </a:fld>
             <a:endParaRPr lang="vi-VN"/>
           </a:p>
@@ -1164,7 +1169,7 @@
           <a:lstStyle/>
           <a:p>
             <a:r>
-              <a:rPr lang="en-US" altLang="zh-TW" smtClean="0"/>
+              <a:rPr lang="en-US" altLang="zh-TW"/>
               <a:t>Click to edit Master title style</a:t>
             </a:r>
             <a:endParaRPr lang="zh-TW" altLang="en-US"/>
@@ -1221,35 +1226,35 @@
           <a:p>
             <a:pPr lvl="0"/>
             <a:r>
-              <a:rPr lang="en-US" altLang="zh-TW" smtClean="0"/>
+              <a:rPr lang="en-US" altLang="zh-TW"/>
               <a:t>Edit Master text styles</a:t>
             </a:r>
           </a:p>
           <a:p>
             <a:pPr lvl="1"/>
             <a:r>
-              <a:rPr lang="en-US" altLang="zh-TW" smtClean="0"/>
+              <a:rPr lang="en-US" altLang="zh-TW"/>
               <a:t>Second level</a:t>
             </a:r>
           </a:p>
           <a:p>
             <a:pPr lvl="2"/>
             <a:r>
-              <a:rPr lang="en-US" altLang="zh-TW" smtClean="0"/>
+              <a:rPr lang="en-US" altLang="zh-TW"/>
               <a:t>Third level</a:t>
             </a:r>
           </a:p>
           <a:p>
             <a:pPr lvl="3"/>
             <a:r>
-              <a:rPr lang="en-US" altLang="zh-TW" smtClean="0"/>
+              <a:rPr lang="en-US" altLang="zh-TW"/>
               <a:t>Fourth level</a:t>
             </a:r>
           </a:p>
           <a:p>
             <a:pPr lvl="4"/>
             <a:r>
-              <a:rPr lang="en-US" altLang="zh-TW" smtClean="0"/>
+              <a:rPr lang="en-US" altLang="zh-TW"/>
               <a:t>Fifth level</a:t>
             </a:r>
             <a:endParaRPr lang="zh-TW" altLang="en-US"/>
@@ -1306,35 +1311,35 @@
           <a:p>
             <a:pPr lvl="0"/>
             <a:r>
-              <a:rPr lang="en-US" altLang="zh-TW" smtClean="0"/>
+              <a:rPr lang="en-US" altLang="zh-TW"/>
               <a:t>Edit Master text styles</a:t>
             </a:r>
           </a:p>
           <a:p>
             <a:pPr lvl="1"/>
             <a:r>
-              <a:rPr lang="en-US" altLang="zh-TW" smtClean="0"/>
+              <a:rPr lang="en-US" altLang="zh-TW"/>
               <a:t>Second level</a:t>
             </a:r>
           </a:p>
           <a:p>
             <a:pPr lvl="2"/>
             <a:r>
-              <a:rPr lang="en-US" altLang="zh-TW" smtClean="0"/>
+              <a:rPr lang="en-US" altLang="zh-TW"/>
               <a:t>Third level</a:t>
             </a:r>
           </a:p>
           <a:p>
             <a:pPr lvl="3"/>
             <a:r>
-              <a:rPr lang="en-US" altLang="zh-TW" smtClean="0"/>
+              <a:rPr lang="en-US" altLang="zh-TW"/>
               <a:t>Fourth level</a:t>
             </a:r>
           </a:p>
           <a:p>
             <a:pPr lvl="4"/>
             <a:r>
-              <a:rPr lang="en-US" altLang="zh-TW" smtClean="0"/>
+              <a:rPr lang="en-US" altLang="zh-TW"/>
               <a:t>Fifth level</a:t>
             </a:r>
             <a:endParaRPr lang="zh-TW" altLang="en-US"/>
@@ -1358,7 +1363,7 @@
           <a:p>
             <a:fld id="{4B6CAC28-8530-41E9-B383-7D910AF0A2E7}" type="datetimeFigureOut">
               <a:rPr lang="vi-VN" smtClean="0"/>
-              <a:t>03/04/2021</a:t>
+              <a:t>27/01/2025</a:t>
             </a:fld>
             <a:endParaRPr lang="vi-VN"/>
           </a:p>
@@ -1456,7 +1461,7 @@
           </a:lstStyle>
           <a:p>
             <a:r>
-              <a:rPr lang="en-US" altLang="zh-TW" smtClean="0"/>
+              <a:rPr lang="en-US" altLang="zh-TW"/>
               <a:t>Click to edit Master title style</a:t>
             </a:r>
             <a:endParaRPr lang="zh-TW" altLang="en-US"/>
@@ -1522,7 +1527,7 @@
           <a:p>
             <a:pPr lvl="0"/>
             <a:r>
-              <a:rPr lang="en-US" altLang="zh-TW" smtClean="0"/>
+              <a:rPr lang="en-US" altLang="zh-TW"/>
               <a:t>Edit Master text styles</a:t>
             </a:r>
           </a:p>
@@ -1578,35 +1583,35 @@
           <a:p>
             <a:pPr lvl="0"/>
             <a:r>
-              <a:rPr lang="en-US" altLang="zh-TW" smtClean="0"/>
+              <a:rPr lang="en-US" altLang="zh-TW"/>
               <a:t>Edit Master text styles</a:t>
             </a:r>
           </a:p>
           <a:p>
             <a:pPr lvl="1"/>
             <a:r>
-              <a:rPr lang="en-US" altLang="zh-TW" smtClean="0"/>
+              <a:rPr lang="en-US" altLang="zh-TW"/>
               <a:t>Second level</a:t>
             </a:r>
           </a:p>
           <a:p>
             <a:pPr lvl="2"/>
             <a:r>
-              <a:rPr lang="en-US" altLang="zh-TW" smtClean="0"/>
+              <a:rPr lang="en-US" altLang="zh-TW"/>
               <a:t>Third level</a:t>
             </a:r>
           </a:p>
           <a:p>
             <a:pPr lvl="3"/>
             <a:r>
-              <a:rPr lang="en-US" altLang="zh-TW" smtClean="0"/>
+              <a:rPr lang="en-US" altLang="zh-TW"/>
               <a:t>Fourth level</a:t>
             </a:r>
           </a:p>
           <a:p>
             <a:pPr lvl="4"/>
             <a:r>
-              <a:rPr lang="en-US" altLang="zh-TW" smtClean="0"/>
+              <a:rPr lang="en-US" altLang="zh-TW"/>
               <a:t>Fifth level</a:t>
             </a:r>
             <a:endParaRPr lang="zh-TW" altLang="en-US"/>
@@ -1672,7 +1677,7 @@
           <a:p>
             <a:pPr lvl="0"/>
             <a:r>
-              <a:rPr lang="en-US" altLang="zh-TW" smtClean="0"/>
+              <a:rPr lang="en-US" altLang="zh-TW"/>
               <a:t>Edit Master text styles</a:t>
             </a:r>
           </a:p>
@@ -1728,35 +1733,35 @@
           <a:p>
             <a:pPr lvl="0"/>
             <a:r>
-              <a:rPr lang="en-US" altLang="zh-TW" smtClean="0"/>
+              <a:rPr lang="en-US" altLang="zh-TW"/>
               <a:t>Edit Master text styles</a:t>
             </a:r>
           </a:p>
           <a:p>
             <a:pPr lvl="1"/>
             <a:r>
-              <a:rPr lang="en-US" altLang="zh-TW" smtClean="0"/>
+              <a:rPr lang="en-US" altLang="zh-TW"/>
               <a:t>Second level</a:t>
             </a:r>
           </a:p>
           <a:p>
             <a:pPr lvl="2"/>
             <a:r>
-              <a:rPr lang="en-US" altLang="zh-TW" smtClean="0"/>
+              <a:rPr lang="en-US" altLang="zh-TW"/>
               <a:t>Third level</a:t>
             </a:r>
           </a:p>
           <a:p>
             <a:pPr lvl="3"/>
             <a:r>
-              <a:rPr lang="en-US" altLang="zh-TW" smtClean="0"/>
+              <a:rPr lang="en-US" altLang="zh-TW"/>
               <a:t>Fourth level</a:t>
             </a:r>
           </a:p>
           <a:p>
             <a:pPr lvl="4"/>
             <a:r>
-              <a:rPr lang="en-US" altLang="zh-TW" smtClean="0"/>
+              <a:rPr lang="en-US" altLang="zh-TW"/>
               <a:t>Fifth level</a:t>
             </a:r>
             <a:endParaRPr lang="zh-TW" altLang="en-US"/>
@@ -1780,7 +1785,7 @@
           <a:p>
             <a:fld id="{4B6CAC28-8530-41E9-B383-7D910AF0A2E7}" type="datetimeFigureOut">
               <a:rPr lang="vi-VN" smtClean="0"/>
-              <a:t>03/04/2021</a:t>
+              <a:t>27/01/2025</a:t>
             </a:fld>
             <a:endParaRPr lang="vi-VN"/>
           </a:p>
@@ -1874,7 +1879,7 @@
           <a:lstStyle/>
           <a:p>
             <a:r>
-              <a:rPr lang="en-US" altLang="zh-TW" smtClean="0"/>
+              <a:rPr lang="en-US" altLang="zh-TW"/>
               <a:t>Click to edit Master title style</a:t>
             </a:r>
             <a:endParaRPr lang="zh-TW" altLang="en-US"/>
@@ -1898,7 +1903,7 @@
           <a:p>
             <a:fld id="{4B6CAC28-8530-41E9-B383-7D910AF0A2E7}" type="datetimeFigureOut">
               <a:rPr lang="vi-VN" smtClean="0"/>
-              <a:t>03/04/2021</a:t>
+              <a:t>27/01/2025</a:t>
             </a:fld>
             <a:endParaRPr lang="vi-VN"/>
           </a:p>
@@ -1993,7 +1998,7 @@
           <a:p>
             <a:fld id="{4B6CAC28-8530-41E9-B383-7D910AF0A2E7}" type="datetimeFigureOut">
               <a:rPr lang="vi-VN" smtClean="0"/>
-              <a:t>03/04/2021</a:t>
+              <a:t>27/01/2025</a:t>
             </a:fld>
             <a:endParaRPr lang="vi-VN"/>
           </a:p>
@@ -2096,7 +2101,7 @@
           </a:lstStyle>
           <a:p>
             <a:r>
-              <a:rPr lang="en-US" altLang="zh-TW" smtClean="0"/>
+              <a:rPr lang="en-US" altLang="zh-TW"/>
               <a:t>Click to edit Master title style</a:t>
             </a:r>
             <a:endParaRPr lang="zh-TW" altLang="en-US"/>
@@ -2153,35 +2158,35 @@
           <a:p>
             <a:pPr lvl="0"/>
             <a:r>
-              <a:rPr lang="en-US" altLang="zh-TW" smtClean="0"/>
+              <a:rPr lang="en-US" altLang="zh-TW"/>
               <a:t>Edit Master text styles</a:t>
             </a:r>
           </a:p>
           <a:p>
             <a:pPr lvl="1"/>
             <a:r>
-              <a:rPr lang="en-US" altLang="zh-TW" smtClean="0"/>
+              <a:rPr lang="en-US" altLang="zh-TW"/>
               <a:t>Second level</a:t>
             </a:r>
           </a:p>
           <a:p>
             <a:pPr lvl="2"/>
             <a:r>
-              <a:rPr lang="en-US" altLang="zh-TW" smtClean="0"/>
+              <a:rPr lang="en-US" altLang="zh-TW"/>
               <a:t>Third level</a:t>
             </a:r>
           </a:p>
           <a:p>
             <a:pPr lvl="3"/>
             <a:r>
-              <a:rPr lang="en-US" altLang="zh-TW" smtClean="0"/>
+              <a:rPr lang="en-US" altLang="zh-TW"/>
               <a:t>Fourth level</a:t>
             </a:r>
           </a:p>
           <a:p>
             <a:pPr lvl="4"/>
             <a:r>
-              <a:rPr lang="en-US" altLang="zh-TW" smtClean="0"/>
+              <a:rPr lang="en-US" altLang="zh-TW"/>
               <a:t>Fifth level</a:t>
             </a:r>
             <a:endParaRPr lang="zh-TW" altLang="en-US"/>
@@ -2247,7 +2252,7 @@
           <a:p>
             <a:pPr lvl="0"/>
             <a:r>
-              <a:rPr lang="en-US" altLang="zh-TW" smtClean="0"/>
+              <a:rPr lang="en-US" altLang="zh-TW"/>
               <a:t>Edit Master text styles</a:t>
             </a:r>
           </a:p>
@@ -2270,7 +2275,7 @@
           <a:p>
             <a:fld id="{4B6CAC28-8530-41E9-B383-7D910AF0A2E7}" type="datetimeFigureOut">
               <a:rPr lang="vi-VN" smtClean="0"/>
-              <a:t>03/04/2021</a:t>
+              <a:t>27/01/2025</a:t>
             </a:fld>
             <a:endParaRPr lang="vi-VN"/>
           </a:p>
@@ -2373,7 +2378,7 @@
           </a:lstStyle>
           <a:p>
             <a:r>
-              <a:rPr lang="en-US" altLang="zh-TW" smtClean="0"/>
+              <a:rPr lang="en-US" altLang="zh-TW"/>
               <a:t>Click to edit Master title style</a:t>
             </a:r>
             <a:endParaRPr lang="zh-TW" altLang="en-US"/>
@@ -2438,7 +2443,7 @@
           </a:lstStyle>
           <a:p>
             <a:r>
-              <a:rPr lang="en-US" altLang="zh-TW" smtClean="0"/>
+              <a:rPr lang="en-US" altLang="zh-TW"/>
               <a:t>Click icon to add picture</a:t>
             </a:r>
             <a:endParaRPr lang="zh-TW" altLang="en-US"/>
@@ -2504,7 +2509,7 @@
           <a:p>
             <a:pPr lvl="0"/>
             <a:r>
-              <a:rPr lang="en-US" altLang="zh-TW" smtClean="0"/>
+              <a:rPr lang="en-US" altLang="zh-TW"/>
               <a:t>Edit Master text styles</a:t>
             </a:r>
           </a:p>
@@ -2527,7 +2532,7 @@
           <a:p>
             <a:fld id="{4B6CAC28-8530-41E9-B383-7D910AF0A2E7}" type="datetimeFigureOut">
               <a:rPr lang="vi-VN" smtClean="0"/>
-              <a:t>03/04/2021</a:t>
+              <a:t>27/01/2025</a:t>
             </a:fld>
             <a:endParaRPr lang="vi-VN"/>
           </a:p>
@@ -2641,10 +2646,9 @@
           <a:lstStyle/>
           <a:p>
             <a:r>
-              <a:rPr lang="zh-TW" altLang="en-US" smtClean="0"/>
+              <a:rPr lang="zh-TW" altLang="en-US"/>
               <a:t>按一下以編輯母片標題樣式</a:t>
             </a:r>
-            <a:endParaRPr lang="zh-TW" altLang="en-US"/>
           </a:p>
         </p:txBody>
       </p:sp>
@@ -2675,38 +2679,37 @@
           <a:p>
             <a:pPr lvl="0"/>
             <a:r>
-              <a:rPr lang="zh-TW" altLang="en-US" smtClean="0"/>
+              <a:rPr lang="zh-TW" altLang="en-US"/>
               <a:t>按一下以編輯母片文字樣式</a:t>
             </a:r>
           </a:p>
           <a:p>
             <a:pPr lvl="1"/>
             <a:r>
-              <a:rPr lang="zh-TW" altLang="en-US" smtClean="0"/>
+              <a:rPr lang="zh-TW" altLang="en-US"/>
               <a:t>第二層</a:t>
             </a:r>
           </a:p>
           <a:p>
             <a:pPr lvl="2"/>
             <a:r>
-              <a:rPr lang="zh-TW" altLang="en-US" smtClean="0"/>
+              <a:rPr lang="zh-TW" altLang="en-US"/>
               <a:t>第三層</a:t>
             </a:r>
           </a:p>
           <a:p>
             <a:pPr lvl="3"/>
             <a:r>
-              <a:rPr lang="zh-TW" altLang="en-US" smtClean="0"/>
+              <a:rPr lang="zh-TW" altLang="en-US"/>
               <a:t>第四層</a:t>
             </a:r>
           </a:p>
           <a:p>
             <a:pPr lvl="4"/>
             <a:r>
-              <a:rPr lang="zh-TW" altLang="en-US" smtClean="0"/>
+              <a:rPr lang="zh-TW" altLang="en-US"/>
               <a:t>第五層</a:t>
             </a:r>
-            <a:endParaRPr lang="zh-TW" altLang="en-US"/>
           </a:p>
         </p:txBody>
       </p:sp>
@@ -2745,7 +2748,7 @@
           <a:p>
             <a:fld id="{4B6CAC28-8530-41E9-B383-7D910AF0A2E7}" type="datetimeFigureOut">
               <a:rPr lang="vi-VN" smtClean="0"/>
-              <a:t>03/04/2021</a:t>
+              <a:t>27/01/2025</a:t>
             </a:fld>
             <a:endParaRPr lang="vi-VN"/>
           </a:p>
@@ -3143,7 +3146,7 @@
           <a:lstStyle/>
           <a:p>
             <a:r>
-              <a:rPr lang="zh-CN" altLang="en-US" b="1" dirty="0" smtClean="0">
+              <a:rPr lang="zh-CN" altLang="en-US" b="1" i="1" dirty="0">
                 <a:solidFill>
                   <a:srgbClr val="660033"/>
                 </a:solidFill>
@@ -3160,7 +3163,7 @@
               <a:t>宣 </a:t>
             </a:r>
             <a:r>
-              <a:rPr lang="en-US" altLang="zh-CN" b="1" dirty="0" smtClean="0">
+              <a:rPr lang="en-US" altLang="zh-CN" b="1" i="1" dirty="0">
                 <a:solidFill>
                   <a:srgbClr val="660033"/>
                 </a:solidFill>
@@ -3174,7 +3177,7 @@
                 <a:latin typeface="微軟正黑體" pitchFamily="34" charset="-120"/>
                 <a:ea typeface="微軟正黑體" pitchFamily="34" charset="-120"/>
               </a:rPr>
-              <a:t>212</a:t>
+              <a:t>212 -</a:t>
             </a:r>
             <a:r>
               <a:rPr lang="zh-TW" altLang="en-US" sz="7200" b="1" i="1" dirty="0">
@@ -3191,41 +3194,7 @@
                 <a:latin typeface="微軟正黑體" pitchFamily="34" charset="-120"/>
                 <a:ea typeface="微軟正黑體" pitchFamily="34" charset="-120"/>
               </a:rPr>
-              <a:t> </a:t>
-            </a:r>
-            <a:r>
-              <a:rPr lang="zh-TW" altLang="en-US" sz="7200" b="1" dirty="0">
-                <a:solidFill>
-                  <a:srgbClr val="660033"/>
-                </a:solidFill>
-                <a:effectLst>
-                  <a:outerShdw blurRad="38100" dist="38100" dir="2700000" algn="tl">
-                    <a:srgbClr val="000000">
-                      <a:alpha val="43137"/>
-                    </a:srgbClr>
-                  </a:outerShdw>
-                </a:effectLst>
-                <a:latin typeface="微軟正黑體" pitchFamily="34" charset="-120"/>
-                <a:ea typeface="微軟正黑體" pitchFamily="34" charset="-120"/>
-              </a:rPr>
-              <a:t>親</a:t>
-            </a:r>
-            <a:r>
-              <a:rPr lang="zh-TW" altLang="en-US" sz="7200" b="1" dirty="0">
-                <a:solidFill>
-                  <a:srgbClr val="660033"/>
-                </a:solidFill>
-                <a:effectLst>
-                  <a:outerShdw blurRad="38100" dist="38100" dir="2700000" algn="tl">
-                    <a:srgbClr val="000000">
-                      <a:alpha val="43137"/>
-                    </a:srgbClr>
-                  </a:outerShdw>
-                </a:effectLst>
-                <a:latin typeface="微軟正黑體" pitchFamily="34" charset="-120"/>
-                <a:ea typeface="微軟正黑體" pitchFamily="34" charset="-120"/>
-              </a:rPr>
-              <a:t>愛耶穌</a:t>
+              <a:t> 親愛耶穌</a:t>
             </a:r>
           </a:p>
         </p:txBody>
@@ -3269,7 +3238,7 @@
           </a:lstStyle>
           <a:p>
             <a:r>
-              <a:rPr lang="vi-VN" altLang="zh-TW" sz="5333" b="1" dirty="0">
+              <a:rPr lang="vi-VN" altLang="zh-TW" b="1" i="1" dirty="0">
                 <a:solidFill>
                   <a:srgbClr val="000066"/>
                 </a:solidFill>
@@ -3284,10 +3253,10 @@
                 <a:ea typeface="微軟正黑體" pitchFamily="34" charset="-120"/>
                 <a:cs typeface="Calibri" panose="020F0502020204030204" pitchFamily="34" charset="0"/>
               </a:rPr>
-              <a:t>TC </a:t>
-            </a:r>
-            <a:r>
-              <a:rPr lang="vi-VN" altLang="zh-TW" sz="5333" b="1" dirty="0">
+              <a:t>Càng yêu Chúa hơn</a:t>
+            </a:r>
+            <a:r>
+              <a:rPr lang="en-US" altLang="zh-TW" b="1" i="1" dirty="0">
                 <a:solidFill>
                   <a:srgbClr val="000066"/>
                 </a:solidFill>
@@ -3302,10 +3271,10 @@
                 <a:ea typeface="微軟正黑體" pitchFamily="34" charset="-120"/>
                 <a:cs typeface="Calibri" panose="020F0502020204030204" pitchFamily="34" charset="0"/>
               </a:rPr>
-              <a:t>299</a:t>
-            </a:r>
-            <a:r>
-              <a:rPr lang="vi-VN" altLang="zh-TW" b="1" dirty="0">
+              <a:t> (</a:t>
+            </a:r>
+            <a:r>
+              <a:rPr lang="vi-VN" altLang="zh-TW" sz="6000" b="1" i="1" dirty="0">
                 <a:solidFill>
                   <a:srgbClr val="000066"/>
                 </a:solidFill>
@@ -3320,9 +3289,27 @@
                 <a:ea typeface="微軟正黑體" pitchFamily="34" charset="-120"/>
                 <a:cs typeface="Calibri" panose="020F0502020204030204" pitchFamily="34" charset="0"/>
               </a:rPr>
-              <a:t>  Càng yêu Chúa hơn</a:t>
-            </a:r>
-            <a:endParaRPr lang="zh-TW" altLang="en-US" b="1" dirty="0">
+              <a:t>TC 299</a:t>
+            </a:r>
+            <a:r>
+              <a:rPr lang="en-US" altLang="zh-TW" sz="6000" b="1" i="1" dirty="0">
+                <a:solidFill>
+                  <a:srgbClr val="000066"/>
+                </a:solidFill>
+                <a:effectLst>
+                  <a:outerShdw blurRad="38100" dist="38100" dir="2700000" algn="tl">
+                    <a:srgbClr val="000000">
+                      <a:alpha val="43137"/>
+                    </a:srgbClr>
+                  </a:outerShdw>
+                </a:effectLst>
+                <a:latin typeface="Calibri" panose="020F0502020204030204" pitchFamily="34" charset="0"/>
+                <a:ea typeface="微軟正黑體" pitchFamily="34" charset="-120"/>
+                <a:cs typeface="Calibri" panose="020F0502020204030204" pitchFamily="34" charset="0"/>
+              </a:rPr>
+              <a:t>)</a:t>
+            </a:r>
+            <a:endParaRPr lang="zh-TW" altLang="en-US" b="1" i="1" dirty="0">
               <a:solidFill>
                 <a:srgbClr val="000066"/>
               </a:solidFill>
@@ -3405,13 +3392,6 @@
               </a:rPr>
               <a:t>無論死生憂樂  我仍愛我主</a:t>
             </a:r>
-            <a:endParaRPr lang="zh-TW" altLang="en-US" sz="6400" b="1" dirty="0">
-              <a:solidFill>
-                <a:srgbClr val="660033"/>
-              </a:solidFill>
-              <a:latin typeface="微軟正黑體" pitchFamily="34" charset="-120"/>
-              <a:ea typeface="微軟正黑體" pitchFamily="34" charset="-120"/>
-            </a:endParaRPr>
           </a:p>
         </p:txBody>
       </p:sp>
@@ -3775,14 +3755,6 @@
               </a:rPr>
               <a:t> Cha</a:t>
             </a:r>
-            <a:endParaRPr lang="en-US" b="1" dirty="0">
-              <a:solidFill>
-                <a:srgbClr val="000066"/>
-              </a:solidFill>
-              <a:latin typeface="Calibri" panose="020F0502020204030204" pitchFamily="34" charset="0"/>
-              <a:ea typeface="微軟正黑體" pitchFamily="34" charset="-120"/>
-              <a:cs typeface="Calibri" panose="020F0502020204030204" pitchFamily="34" charset="0"/>
-            </a:endParaRPr>
           </a:p>
         </p:txBody>
       </p:sp>
@@ -3815,23 +3787,7 @@
                   <a:srgbClr val="000066"/>
                 </a:solidFill>
               </a:rPr>
-              <a:t>( </a:t>
-            </a:r>
-            <a:r>
-              <a:rPr lang="en-US" sz="4267" b="1" dirty="0">
-                <a:solidFill>
-                  <a:srgbClr val="000066"/>
-                </a:solidFill>
-              </a:rPr>
-              <a:t>3 </a:t>
-            </a:r>
-            <a:r>
-              <a:rPr lang="en-US" sz="4267" b="1" dirty="0">
-                <a:solidFill>
-                  <a:srgbClr val="000066"/>
-                </a:solidFill>
-              </a:rPr>
-              <a:t>)</a:t>
+              <a:t>( 3 / 4 )</a:t>
             </a:r>
             <a:endParaRPr lang="vi-VN" sz="4267" b="1" dirty="0">
               <a:solidFill>
@@ -3906,13 +3862,6 @@
               </a:rPr>
               <a:t>在世我要時常讚美主耶穌</a:t>
             </a:r>
-            <a:endParaRPr lang="zh-TW" altLang="en-US" sz="6400" b="1" dirty="0">
-              <a:solidFill>
-                <a:srgbClr val="660033"/>
-              </a:solidFill>
-              <a:latin typeface="微軟正黑體" pitchFamily="34" charset="-120"/>
-              <a:ea typeface="微軟正黑體" pitchFamily="34" charset="-120"/>
-            </a:endParaRPr>
           </a:p>
         </p:txBody>
       </p:sp>
@@ -4298,14 +4247,6 @@
               </a:rPr>
               <a:t> ca</a:t>
             </a:r>
-            <a:endParaRPr lang="en-US" b="1" dirty="0">
-              <a:solidFill>
-                <a:srgbClr val="000066"/>
-              </a:solidFill>
-              <a:latin typeface="Calibri" panose="020F0502020204030204" pitchFamily="34" charset="0"/>
-              <a:ea typeface="微軟正黑體" pitchFamily="34" charset="-120"/>
-              <a:cs typeface="Calibri" panose="020F0502020204030204" pitchFamily="34" charset="0"/>
-            </a:endParaRPr>
           </a:p>
         </p:txBody>
       </p:sp>
@@ -4338,23 +4279,7 @@
                   <a:srgbClr val="000066"/>
                 </a:solidFill>
               </a:rPr>
-              <a:t>( </a:t>
-            </a:r>
-            <a:r>
-              <a:rPr lang="en-US" sz="4267" b="1" dirty="0">
-                <a:solidFill>
-                  <a:srgbClr val="000066"/>
-                </a:solidFill>
-              </a:rPr>
-              <a:t>3 </a:t>
-            </a:r>
-            <a:r>
-              <a:rPr lang="en-US" sz="4267" b="1" dirty="0">
-                <a:solidFill>
-                  <a:srgbClr val="000066"/>
-                </a:solidFill>
-              </a:rPr>
-              <a:t>)</a:t>
+              <a:t>( 3 / 4 )</a:t>
             </a:r>
             <a:endParaRPr lang="vi-VN" sz="4267" b="1" dirty="0">
               <a:solidFill>
@@ -4429,13 +4354,6 @@
               </a:rPr>
               <a:t>直到主再臨我必儆醒等待</a:t>
             </a:r>
-            <a:endParaRPr lang="zh-TW" altLang="en-US" sz="6400" b="1" dirty="0">
-              <a:solidFill>
-                <a:srgbClr val="660033"/>
-              </a:solidFill>
-              <a:latin typeface="微軟正黑體" pitchFamily="34" charset="-120"/>
-              <a:ea typeface="微軟正黑體" pitchFamily="34" charset="-120"/>
-            </a:endParaRPr>
           </a:p>
         </p:txBody>
       </p:sp>
@@ -4872,23 +4790,7 @@
                   <a:srgbClr val="000066"/>
                 </a:solidFill>
               </a:rPr>
-              <a:t>( </a:t>
-            </a:r>
-            <a:r>
-              <a:rPr lang="en-US" sz="4267" b="1" dirty="0">
-                <a:solidFill>
-                  <a:srgbClr val="000066"/>
-                </a:solidFill>
-              </a:rPr>
-              <a:t>3 </a:t>
-            </a:r>
-            <a:r>
-              <a:rPr lang="en-US" sz="4267" b="1" dirty="0">
-                <a:solidFill>
-                  <a:srgbClr val="000066"/>
-                </a:solidFill>
-              </a:rPr>
-              <a:t>)</a:t>
+              <a:t>( 3 / 4 )</a:t>
             </a:r>
             <a:endParaRPr lang="vi-VN" sz="4267" b="1" dirty="0">
               <a:solidFill>
@@ -4963,13 +4865,6 @@
               </a:rPr>
               <a:t>若我曾愛救主  於今更親愛</a:t>
             </a:r>
-            <a:endParaRPr lang="zh-TW" altLang="en-US" sz="6400" b="1" dirty="0">
-              <a:solidFill>
-                <a:srgbClr val="660033"/>
-              </a:solidFill>
-              <a:latin typeface="微軟正黑體" pitchFamily="34" charset="-120"/>
-              <a:ea typeface="微軟正黑體" pitchFamily="34" charset="-120"/>
-            </a:endParaRPr>
           </a:p>
         </p:txBody>
       </p:sp>
@@ -5406,23 +5301,7 @@
                   <a:srgbClr val="000066"/>
                 </a:solidFill>
               </a:rPr>
-              <a:t>( </a:t>
-            </a:r>
-            <a:r>
-              <a:rPr lang="en-US" sz="4267" b="1" dirty="0">
-                <a:solidFill>
-                  <a:srgbClr val="000066"/>
-                </a:solidFill>
-              </a:rPr>
-              <a:t>3 </a:t>
-            </a:r>
-            <a:r>
-              <a:rPr lang="en-US" sz="4267" b="1" dirty="0">
-                <a:solidFill>
-                  <a:srgbClr val="000066"/>
-                </a:solidFill>
-              </a:rPr>
-              <a:t>)</a:t>
+              <a:t>( 3 / 4 )</a:t>
             </a:r>
             <a:endParaRPr lang="vi-VN" sz="4267" b="1" dirty="0">
               <a:solidFill>
@@ -5497,13 +5376,6 @@
               </a:rPr>
               <a:t>主再來迎接我  永住榮耀中</a:t>
             </a:r>
-            <a:endParaRPr lang="zh-TW" altLang="en-US" sz="6400" b="1" dirty="0">
-              <a:solidFill>
-                <a:srgbClr val="660033"/>
-              </a:solidFill>
-              <a:latin typeface="微軟正黑體" pitchFamily="34" charset="-120"/>
-              <a:ea typeface="微軟正黑體" pitchFamily="34" charset="-120"/>
-            </a:endParaRPr>
           </a:p>
         </p:txBody>
       </p:sp>
@@ -5940,23 +5812,7 @@
                   <a:srgbClr val="000066"/>
                 </a:solidFill>
               </a:rPr>
-              <a:t>( </a:t>
-            </a:r>
-            <a:r>
-              <a:rPr lang="en-US" sz="4267" b="1" dirty="0">
-                <a:solidFill>
-                  <a:srgbClr val="000066"/>
-                </a:solidFill>
-              </a:rPr>
-              <a:t>4 </a:t>
-            </a:r>
-            <a:r>
-              <a:rPr lang="en-US" sz="4267" b="1" dirty="0">
-                <a:solidFill>
-                  <a:srgbClr val="000066"/>
-                </a:solidFill>
-              </a:rPr>
-              <a:t>)</a:t>
+              <a:t>( 4 / 4 )</a:t>
             </a:r>
             <a:endParaRPr lang="vi-VN" sz="4267" b="1" dirty="0">
               <a:solidFill>
@@ -6031,13 +5887,6 @@
               </a:rPr>
               <a:t>我必時常頌揚救主大恩寵</a:t>
             </a:r>
-            <a:endParaRPr lang="zh-TW" altLang="en-US" sz="6400" b="1" dirty="0">
-              <a:solidFill>
-                <a:srgbClr val="660033"/>
-              </a:solidFill>
-              <a:latin typeface="微軟正黑體" pitchFamily="34" charset="-120"/>
-              <a:ea typeface="微軟正黑體" pitchFamily="34" charset="-120"/>
-            </a:endParaRPr>
           </a:p>
         </p:txBody>
       </p:sp>
@@ -6474,23 +6323,7 @@
                   <a:srgbClr val="000066"/>
                 </a:solidFill>
               </a:rPr>
-              <a:t>( </a:t>
-            </a:r>
-            <a:r>
-              <a:rPr lang="en-US" sz="4267" b="1" dirty="0">
-                <a:solidFill>
-                  <a:srgbClr val="000066"/>
-                </a:solidFill>
-              </a:rPr>
-              <a:t>4 </a:t>
-            </a:r>
-            <a:r>
-              <a:rPr lang="en-US" sz="4267" b="1" dirty="0">
-                <a:solidFill>
-                  <a:srgbClr val="000066"/>
-                </a:solidFill>
-              </a:rPr>
-              <a:t>)</a:t>
+              <a:t>( 4 / 4 )</a:t>
             </a:r>
             <a:endParaRPr lang="vi-VN" sz="4267" b="1" dirty="0">
               <a:solidFill>
@@ -6565,13 +6398,6 @@
               </a:rPr>
               <a:t>戴榮耀冠冕賞賜恩乃格外</a:t>
             </a:r>
-            <a:endParaRPr lang="zh-TW" altLang="en-US" sz="6400" b="1" dirty="0">
-              <a:solidFill>
-                <a:srgbClr val="660033"/>
-              </a:solidFill>
-              <a:latin typeface="微軟正黑體" pitchFamily="34" charset="-120"/>
-              <a:ea typeface="微軟正黑體" pitchFamily="34" charset="-120"/>
-            </a:endParaRPr>
           </a:p>
         </p:txBody>
       </p:sp>
@@ -7008,23 +6834,7 @@
                   <a:srgbClr val="000066"/>
                 </a:solidFill>
               </a:rPr>
-              <a:t>( </a:t>
-            </a:r>
-            <a:r>
-              <a:rPr lang="en-US" sz="4267" b="1" dirty="0">
-                <a:solidFill>
-                  <a:srgbClr val="000066"/>
-                </a:solidFill>
-              </a:rPr>
-              <a:t>4 </a:t>
-            </a:r>
-            <a:r>
-              <a:rPr lang="en-US" sz="4267" b="1" dirty="0">
-                <a:solidFill>
-                  <a:srgbClr val="000066"/>
-                </a:solidFill>
-              </a:rPr>
-              <a:t>)</a:t>
+              <a:t>( 4 / 4 )</a:t>
             </a:r>
             <a:endParaRPr lang="vi-VN" sz="4267" b="1" dirty="0">
               <a:solidFill>
@@ -7099,13 +6909,6 @@
               </a:rPr>
               <a:t>若我曾愛救主  於今更親愛</a:t>
             </a:r>
-            <a:endParaRPr lang="zh-TW" altLang="en-US" sz="6400" b="1" dirty="0">
-              <a:solidFill>
-                <a:srgbClr val="660033"/>
-              </a:solidFill>
-              <a:latin typeface="微軟正黑體" pitchFamily="34" charset="-120"/>
-              <a:ea typeface="微軟正黑體" pitchFamily="34" charset="-120"/>
-            </a:endParaRPr>
           </a:p>
         </p:txBody>
       </p:sp>
@@ -7520,23 +7323,7 @@
                   <a:srgbClr val="000066"/>
                 </a:solidFill>
               </a:rPr>
-              <a:t>( </a:t>
-            </a:r>
-            <a:r>
-              <a:rPr lang="en-US" sz="4267" b="1" dirty="0">
-                <a:solidFill>
-                  <a:srgbClr val="000066"/>
-                </a:solidFill>
-              </a:rPr>
-              <a:t>4 </a:t>
-            </a:r>
-            <a:r>
-              <a:rPr lang="en-US" sz="4267" b="1" dirty="0">
-                <a:solidFill>
-                  <a:srgbClr val="000066"/>
-                </a:solidFill>
-              </a:rPr>
-              <a:t>)</a:t>
+              <a:t>( 4 / 4 )</a:t>
             </a:r>
             <a:endParaRPr lang="vi-VN" sz="4267" b="1" dirty="0">
               <a:solidFill>
@@ -7619,7 +7406,7 @@
                 <a:latin typeface="微軟正黑體" pitchFamily="34" charset="-120"/>
                 <a:ea typeface="微軟正黑體" pitchFamily="34" charset="-120"/>
               </a:rPr>
-              <a:t>袮</a:t>
+              <a:t>祢</a:t>
             </a:r>
             <a:r>
               <a:rPr lang="zh-TW" altLang="en-US" sz="6400" b="1" dirty="0">
@@ -7639,7 +7426,7 @@
                 <a:latin typeface="微軟正黑體" pitchFamily="34" charset="-120"/>
                 <a:ea typeface="微軟正黑體" pitchFamily="34" charset="-120"/>
               </a:rPr>
-              <a:t>袮</a:t>
+              <a:t>祢</a:t>
             </a:r>
             <a:endParaRPr lang="en-US" altLang="zh-TW" sz="6400" b="1" dirty="0">
               <a:solidFill>
@@ -7921,18 +7708,7 @@
                 <a:ea typeface="微軟正黑體" pitchFamily="34" charset="-120"/>
                 <a:cs typeface="Calibri" panose="020F0502020204030204" pitchFamily="34" charset="0"/>
               </a:rPr>
-              <a:t> </a:t>
-            </a:r>
-            <a:r>
-              <a:rPr lang="en-US" b="1" dirty="0">
-                <a:solidFill>
-                  <a:srgbClr val="000066"/>
-                </a:solidFill>
-                <a:latin typeface="Calibri" panose="020F0502020204030204" pitchFamily="34" charset="0"/>
-                <a:ea typeface="微軟正黑體" pitchFamily="34" charset="-120"/>
-                <a:cs typeface="Calibri" panose="020F0502020204030204" pitchFamily="34" charset="0"/>
-              </a:rPr>
-              <a:t>– </a:t>
+              <a:t> – </a:t>
             </a:r>
             <a:r>
               <a:rPr lang="en-US" b="1" dirty="0" err="1">
@@ -8073,7 +7849,7 @@
                   <a:srgbClr val="000066"/>
                 </a:solidFill>
               </a:rPr>
-              <a:t>( 1 )</a:t>
+              <a:t>( 1 / 4 )</a:t>
             </a:r>
             <a:endParaRPr lang="vi-VN" sz="4267" b="1" dirty="0">
               <a:solidFill>
@@ -8156,7 +7932,7 @@
                 <a:latin typeface="微軟正黑體" pitchFamily="34" charset="-120"/>
                 <a:ea typeface="微軟正黑體" pitchFamily="34" charset="-120"/>
               </a:rPr>
-              <a:t>袮</a:t>
+              <a:t>祢</a:t>
             </a:r>
             <a:r>
               <a:rPr lang="zh-TW" altLang="en-US" sz="6400" b="1" dirty="0">
@@ -8168,13 +7944,6 @@
               </a:rPr>
               <a:t>全丟棄</a:t>
             </a:r>
-            <a:endParaRPr lang="zh-TW" altLang="en-US" sz="6400" b="1" dirty="0">
-              <a:solidFill>
-                <a:srgbClr val="660033"/>
-              </a:solidFill>
-              <a:latin typeface="微軟正黑體" pitchFamily="34" charset="-120"/>
-              <a:ea typeface="微軟正黑體" pitchFamily="34" charset="-120"/>
-            </a:endParaRPr>
           </a:p>
         </p:txBody>
       </p:sp>
@@ -8582,14 +8351,6 @@
               </a:rPr>
               <a:t>!</a:t>
             </a:r>
-            <a:endParaRPr lang="en-US" b="1" dirty="0">
-              <a:solidFill>
-                <a:srgbClr val="000066"/>
-              </a:solidFill>
-              <a:latin typeface="Calibri" panose="020F0502020204030204" pitchFamily="34" charset="0"/>
-              <a:ea typeface="微軟正黑體" pitchFamily="34" charset="-120"/>
-              <a:cs typeface="Calibri" panose="020F0502020204030204" pitchFamily="34" charset="0"/>
-            </a:endParaRPr>
           </a:p>
         </p:txBody>
       </p:sp>
@@ -8622,7 +8383,7 @@
                   <a:srgbClr val="000066"/>
                 </a:solidFill>
               </a:rPr>
-              <a:t>( 1 )</a:t>
+              <a:t>( 1 / 4 )</a:t>
             </a:r>
             <a:endParaRPr lang="vi-VN" sz="4267" b="1" dirty="0">
               <a:solidFill>
@@ -8695,7 +8456,7 @@
                 <a:latin typeface="微軟正黑體" pitchFamily="34" charset="-120"/>
                 <a:ea typeface="微軟正黑體" pitchFamily="34" charset="-120"/>
               </a:rPr>
-              <a:t>袮</a:t>
+              <a:t>祢</a:t>
             </a:r>
             <a:r>
               <a:rPr lang="zh-TW" altLang="en-US" sz="6400" b="1" dirty="0">
@@ -8707,13 +8468,6 @@
               </a:rPr>
               <a:t>是我救主為我還清罪債</a:t>
             </a:r>
-            <a:endParaRPr lang="zh-TW" altLang="en-US" sz="6400" b="1" dirty="0">
-              <a:solidFill>
-                <a:srgbClr val="660033"/>
-              </a:solidFill>
-              <a:latin typeface="微軟正黑體" pitchFamily="34" charset="-120"/>
-              <a:ea typeface="微軟正黑體" pitchFamily="34" charset="-120"/>
-            </a:endParaRPr>
           </a:p>
         </p:txBody>
       </p:sp>
@@ -9150,7 +8904,7 @@
                   <a:srgbClr val="000066"/>
                 </a:solidFill>
               </a:rPr>
-              <a:t>( 1 )</a:t>
+              <a:t>( 1 / 4 )</a:t>
             </a:r>
             <a:endParaRPr lang="vi-VN" sz="4267" b="1" dirty="0">
               <a:solidFill>
@@ -9225,13 +8979,6 @@
               </a:rPr>
               <a:t>若我曾愛救主  於今更親愛</a:t>
             </a:r>
-            <a:endParaRPr lang="zh-TW" altLang="en-US" sz="6400" b="1" dirty="0">
-              <a:solidFill>
-                <a:srgbClr val="660033"/>
-              </a:solidFill>
-              <a:latin typeface="微軟正黑體" pitchFamily="34" charset="-120"/>
-              <a:ea typeface="微軟正黑體" pitchFamily="34" charset="-120"/>
-            </a:endParaRPr>
           </a:p>
         </p:txBody>
       </p:sp>
@@ -9646,7 +9393,7 @@
                   <a:srgbClr val="000066"/>
                 </a:solidFill>
               </a:rPr>
-              <a:t>( 1 )</a:t>
+              <a:t>( 1 / 4 )</a:t>
             </a:r>
             <a:endParaRPr lang="vi-VN" sz="4267" b="1" dirty="0">
               <a:solidFill>
@@ -9721,13 +9468,6 @@
               </a:rPr>
               <a:t>我深愛主耶穌  因主先愛我</a:t>
             </a:r>
-            <a:endParaRPr lang="zh-TW" altLang="en-US" sz="6400" b="1" dirty="0">
-              <a:solidFill>
-                <a:srgbClr val="660033"/>
-              </a:solidFill>
-              <a:latin typeface="微軟正黑體" pitchFamily="34" charset="-120"/>
-              <a:ea typeface="微軟正黑體" pitchFamily="34" charset="-120"/>
-            </a:endParaRPr>
           </a:p>
         </p:txBody>
       </p:sp>
@@ -10164,23 +9904,7 @@
                   <a:srgbClr val="000066"/>
                 </a:solidFill>
               </a:rPr>
-              <a:t>( </a:t>
-            </a:r>
-            <a:r>
-              <a:rPr lang="en-US" sz="4267" b="1" dirty="0">
-                <a:solidFill>
-                  <a:srgbClr val="000066"/>
-                </a:solidFill>
-              </a:rPr>
-              <a:t>2 </a:t>
-            </a:r>
-            <a:r>
-              <a:rPr lang="en-US" sz="4267" b="1" dirty="0">
-                <a:solidFill>
-                  <a:srgbClr val="000066"/>
-                </a:solidFill>
-              </a:rPr>
-              <a:t>)</a:t>
+              <a:t>( 2 / 4 )</a:t>
             </a:r>
             <a:endParaRPr lang="vi-VN" sz="4267" b="1" dirty="0">
               <a:solidFill>
@@ -10255,13 +9979,6 @@
               </a:rPr>
               <a:t>在十架替我死赦免眾罪過</a:t>
             </a:r>
-            <a:endParaRPr lang="zh-TW" altLang="en-US" sz="6400" b="1" dirty="0">
-              <a:solidFill>
-                <a:srgbClr val="660033"/>
-              </a:solidFill>
-              <a:latin typeface="微軟正黑體" pitchFamily="34" charset="-120"/>
-              <a:ea typeface="微軟正黑體" pitchFamily="34" charset="-120"/>
-            </a:endParaRPr>
           </a:p>
         </p:txBody>
       </p:sp>
@@ -10698,23 +10415,7 @@
                   <a:srgbClr val="000066"/>
                 </a:solidFill>
               </a:rPr>
-              <a:t>( </a:t>
-            </a:r>
-            <a:r>
-              <a:rPr lang="en-US" sz="4267" b="1" dirty="0">
-                <a:solidFill>
-                  <a:srgbClr val="000066"/>
-                </a:solidFill>
-              </a:rPr>
-              <a:t>2 </a:t>
-            </a:r>
-            <a:r>
-              <a:rPr lang="en-US" sz="4267" b="1" dirty="0">
-                <a:solidFill>
-                  <a:srgbClr val="000066"/>
-                </a:solidFill>
-              </a:rPr>
-              <a:t>)</a:t>
+              <a:t>( 2 / 4 )</a:t>
             </a:r>
             <a:endParaRPr lang="vi-VN" sz="4267" b="1" dirty="0">
               <a:solidFill>
@@ -10789,13 +10490,6 @@
               </a:rPr>
               <a:t>主為我戴荊冠受羞辱陷害</a:t>
             </a:r>
-            <a:endParaRPr lang="zh-TW" altLang="en-US" sz="6400" b="1" dirty="0">
-              <a:solidFill>
-                <a:srgbClr val="660033"/>
-              </a:solidFill>
-              <a:latin typeface="微軟正黑體" pitchFamily="34" charset="-120"/>
-              <a:ea typeface="微軟正黑體" pitchFamily="34" charset="-120"/>
-            </a:endParaRPr>
           </a:p>
         </p:txBody>
       </p:sp>
@@ -11232,23 +10926,7 @@
                   <a:srgbClr val="000066"/>
                 </a:solidFill>
               </a:rPr>
-              <a:t>( </a:t>
-            </a:r>
-            <a:r>
-              <a:rPr lang="en-US" sz="4267" b="1" dirty="0">
-                <a:solidFill>
-                  <a:srgbClr val="000066"/>
-                </a:solidFill>
-              </a:rPr>
-              <a:t>2 </a:t>
-            </a:r>
-            <a:r>
-              <a:rPr lang="en-US" sz="4267" b="1" dirty="0">
-                <a:solidFill>
-                  <a:srgbClr val="000066"/>
-                </a:solidFill>
-              </a:rPr>
-              <a:t>)</a:t>
+              <a:t>( 2 / 4 )</a:t>
             </a:r>
             <a:endParaRPr lang="vi-VN" sz="4267" b="1" dirty="0">
               <a:solidFill>
@@ -11323,13 +11001,6 @@
               </a:rPr>
               <a:t>若我曾愛救主  於今更親愛</a:t>
             </a:r>
-            <a:endParaRPr lang="zh-TW" altLang="en-US" sz="6400" b="1" dirty="0">
-              <a:solidFill>
-                <a:srgbClr val="660033"/>
-              </a:solidFill>
-              <a:latin typeface="微軟正黑體" pitchFamily="34" charset="-120"/>
-              <a:ea typeface="微軟正黑體" pitchFamily="34" charset="-120"/>
-            </a:endParaRPr>
           </a:p>
         </p:txBody>
       </p:sp>
@@ -11744,23 +11415,7 @@
                   <a:srgbClr val="000066"/>
                 </a:solidFill>
               </a:rPr>
-              <a:t>( </a:t>
-            </a:r>
-            <a:r>
-              <a:rPr lang="en-US" sz="4267" b="1" dirty="0">
-                <a:solidFill>
-                  <a:srgbClr val="000066"/>
-                </a:solidFill>
-              </a:rPr>
-              <a:t>2 </a:t>
-            </a:r>
-            <a:r>
-              <a:rPr lang="en-US" sz="4267" b="1" dirty="0">
-                <a:solidFill>
-                  <a:srgbClr val="000066"/>
-                </a:solidFill>
-              </a:rPr>
-              <a:t>)</a:t>
+              <a:t>( 2 / 4 )</a:t>
             </a:r>
             <a:endParaRPr lang="vi-VN" sz="4267" b="1" dirty="0">
               <a:solidFill>
